--- a/Presentation/IoMT_IDS_Presentation_WN.pptx
+++ b/Presentation/IoMT_IDS_Presentation_WN.pptx
@@ -140,9 +140,60 @@
 <file path=ppt/revisionInfo.xml><?xml version="1.0" encoding="utf-8"?>
 <p1510:revInfo xmlns:a="http://schemas.openxmlformats.org/drawingml/2006/main" xmlns:r="http://schemas.openxmlformats.org/officeDocument/2006/relationships" xmlns:p1510="http://schemas.microsoft.com/office/powerpoint/2015/10/main">
   <p1510:revLst>
-    <p1510:client id="{7BF04AB4-6846-4849-A1B8-6A167A3B7532}" v="395" dt="2026-03-19T15:25:41.810"/>
+    <p1510:client id="{7B63DABB-A045-1E4B-89BB-A2393A5F3F15}" v="19" dt="2026-03-21T10:53:08.278"/>
   </p1510:revLst>
 </p1510:revInfo>
+</file>
+
+<file path=ppt/changesInfos/changesInfo1.xml><?xml version="1.0" encoding="utf-8"?>
+<pc:chgInfo xmlns:a="http://schemas.openxmlformats.org/drawingml/2006/main" xmlns:r="http://schemas.openxmlformats.org/officeDocument/2006/relationships" xmlns:ac="http://schemas.microsoft.com/office/drawing/2013/main/command" xmlns:pc="http://schemas.microsoft.com/office/powerpoint/2013/main/command">
+  <pc:docChgLst>
+    <pc:chgData name="耀泉 马" userId="19e30af8d5659de2" providerId="LiveId" clId="{C3594856-CEDA-5129-B2AF-7962E3CA4CA3}"/>
+    <pc:docChg chg="custSel modSld">
+      <pc:chgData name="耀泉 马" userId="19e30af8d5659de2" providerId="LiveId" clId="{C3594856-CEDA-5129-B2AF-7962E3CA4CA3}" dt="2026-03-21T10:54:57.136" v="2848" actId="20577"/>
+      <pc:docMkLst>
+        <pc:docMk/>
+      </pc:docMkLst>
+      <pc:sldChg chg="modSp modNotesTx">
+        <pc:chgData name="耀泉 马" userId="19e30af8d5659de2" providerId="LiveId" clId="{C3594856-CEDA-5129-B2AF-7962E3CA4CA3}" dt="2026-03-21T10:45:58.692" v="2402" actId="20577"/>
+        <pc:sldMkLst>
+          <pc:docMk/>
+          <pc:sldMk cId="97672137" sldId="567"/>
+        </pc:sldMkLst>
+        <pc:spChg chg="mod">
+          <ac:chgData name="耀泉 马" userId="19e30af8d5659de2" providerId="LiveId" clId="{C3594856-CEDA-5129-B2AF-7962E3CA4CA3}" dt="2026-03-21T10:16:04.258" v="0" actId="20578"/>
+          <ac:spMkLst>
+            <pc:docMk/>
+            <pc:sldMk cId="97672137" sldId="567"/>
+            <ac:spMk id="74" creationId="{29665D1C-4ABA-552D-0FE9-268E0E5E200C}"/>
+          </ac:spMkLst>
+        </pc:spChg>
+      </pc:sldChg>
+      <pc:sldChg chg="modSp mod modNotesTx">
+        <pc:chgData name="耀泉 马" userId="19e30af8d5659de2" providerId="LiveId" clId="{C3594856-CEDA-5129-B2AF-7962E3CA4CA3}" dt="2026-03-21T10:47:02.560" v="2438" actId="20577"/>
+        <pc:sldMkLst>
+          <pc:docMk/>
+          <pc:sldMk cId="124941270" sldId="568"/>
+        </pc:sldMkLst>
+        <pc:spChg chg="mod">
+          <ac:chgData name="耀泉 马" userId="19e30af8d5659de2" providerId="LiveId" clId="{C3594856-CEDA-5129-B2AF-7962E3CA4CA3}" dt="2026-03-21T10:28:43.473" v="1113" actId="20577"/>
+          <ac:spMkLst>
+            <pc:docMk/>
+            <pc:sldMk cId="124941270" sldId="568"/>
+            <ac:spMk id="85" creationId="{21140516-44F2-3AE9-474E-83DB7D4DC8F7}"/>
+          </ac:spMkLst>
+        </pc:spChg>
+      </pc:sldChg>
+      <pc:sldChg chg="modNotesTx">
+        <pc:chgData name="耀泉 马" userId="19e30af8d5659de2" providerId="LiveId" clId="{C3594856-CEDA-5129-B2AF-7962E3CA4CA3}" dt="2026-03-21T10:54:57.136" v="2848" actId="20577"/>
+        <pc:sldMkLst>
+          <pc:docMk/>
+          <pc:sldMk cId="557709212" sldId="569"/>
+        </pc:sldMkLst>
+      </pc:sldChg>
+    </pc:docChg>
+  </pc:docChgLst>
+</pc:chgInfo>
 </file>
 
 <file path=ppt/notesMasters/notesMaster1.xml><?xml version="1.0" encoding="utf-8"?>
@@ -227,7 +278,7 @@
           <a:p>
             <a:fld id="{26149304-4996-5048-AF8D-AE7FCF302DAE}" type="datetimeFigureOut">
               <a:rPr lang="en-US" smtClean="0"/>
-              <a:t>3/20/2026</a:t>
+              <a:t>3/21/26</a:t>
             </a:fld>
             <a:endParaRPr lang="en-US"/>
           </a:p>
@@ -627,11 +678,327 @@
           <a:bodyPr/>
           <a:lstStyle/>
           <a:p>
-            <a:r>
-              <a:rPr lang="en-US" altLang="zh-CN" dirty="0"/>
-              <a:t>65936ff6-046c-4ad8-b07a-aa9db2ce43c0.source.3.zh-Hans</a:t>
-            </a:r>
-            <a:endParaRPr lang="zh-CN" altLang="en-US" dirty="0"/>
+            <a:pPr marL="0" marR="0" lvl="0" indent="0" algn="l" defTabSz="914400" rtl="0" eaLnBrk="1" fontAlgn="auto" latinLnBrk="0" hangingPunct="1">
+              <a:lnSpc>
+                <a:spcPct val="100000"/>
+              </a:lnSpc>
+              <a:spcBef>
+                <a:spcPts val="0"/>
+              </a:spcBef>
+              <a:spcAft>
+                <a:spcPts val="0"/>
+              </a:spcAft>
+              <a:buClrTx/>
+              <a:buSzTx/>
+              <a:buFontTx/>
+              <a:buNone/>
+              <a:tabLst/>
+              <a:defRPr/>
+            </a:pPr>
+            <a:r>
+              <a:rPr lang="en-US" altLang="zh-CN" sz="1200" dirty="0"/>
+              <a:t>Although AI-based IDS can strengthen security, IoMT devices have limited computation, memory, storage, and bandwidth.</a:t>
+            </a:r>
+          </a:p>
+          <a:p>
+            <a:pPr marL="0" marR="0" lvl="0" indent="0" algn="l" defTabSz="914400" rtl="0" eaLnBrk="1" fontAlgn="auto" latinLnBrk="0" hangingPunct="1">
+              <a:lnSpc>
+                <a:spcPct val="100000"/>
+              </a:lnSpc>
+              <a:spcBef>
+                <a:spcPts val="0"/>
+              </a:spcBef>
+              <a:spcAft>
+                <a:spcPts val="0"/>
+              </a:spcAft>
+              <a:buClrTx/>
+              <a:buSzTx/>
+              <a:buFontTx/>
+              <a:buNone/>
+              <a:tabLst/>
+              <a:defRPr/>
+            </a:pPr>
+            <a:r>
+              <a:rPr lang="zh-CN" altLang="en-US" sz="1200" dirty="0"/>
+              <a:t>总是感觉怪怪的</a:t>
+            </a:r>
+            <a:r>
+              <a:rPr lang="en-US" altLang="zh-CN" sz="1200" dirty="0"/>
+              <a:t>,</a:t>
+            </a:r>
+            <a:r>
+              <a:rPr lang="zh-CN" altLang="en-US" sz="1200" dirty="0"/>
+              <a:t> 应该说重点是资源受限</a:t>
+            </a:r>
+            <a:r>
+              <a:rPr lang="en-US" altLang="zh-CN" sz="1200" dirty="0"/>
+              <a:t>,</a:t>
+            </a:r>
+            <a:r>
+              <a:rPr lang="zh-CN" altLang="en-US" sz="1200" dirty="0"/>
+              <a:t> 限制了</a:t>
+            </a:r>
+            <a:r>
+              <a:rPr lang="en-US" altLang="zh-CN" sz="1200" dirty="0"/>
+              <a:t>AI-based</a:t>
+            </a:r>
+            <a:r>
+              <a:rPr lang="zh-CN" altLang="en-US" sz="1200" dirty="0"/>
+              <a:t> </a:t>
+            </a:r>
+            <a:r>
+              <a:rPr lang="en-US" altLang="zh-CN" sz="1200" dirty="0"/>
+              <a:t>edge</a:t>
+            </a:r>
+            <a:r>
+              <a:rPr lang="zh-CN" altLang="en-US" sz="1200" dirty="0"/>
+              <a:t> </a:t>
+            </a:r>
+            <a:r>
+              <a:rPr lang="en-US" altLang="zh-CN" sz="1200" dirty="0"/>
+              <a:t>device</a:t>
+            </a:r>
+            <a:r>
+              <a:rPr lang="zh-CN" altLang="en-US" sz="1200" dirty="0"/>
+              <a:t>或者</a:t>
+            </a:r>
+            <a:r>
+              <a:rPr lang="en-US" altLang="zh-CN" sz="1200" dirty="0"/>
+              <a:t>IOMT</a:t>
+            </a:r>
+            <a:r>
+              <a:rPr lang="zh-CN" altLang="en-US" sz="1200" dirty="0"/>
+              <a:t>设备上部署</a:t>
+            </a:r>
+            <a:r>
+              <a:rPr lang="en-US" altLang="zh-CN" sz="1200" dirty="0"/>
+              <a:t>.</a:t>
+            </a:r>
+          </a:p>
+          <a:p>
+            <a:pPr marL="0" marR="0" lvl="0" indent="0" algn="l" defTabSz="914400" rtl="0" eaLnBrk="1" fontAlgn="auto" latinLnBrk="0" hangingPunct="1">
+              <a:lnSpc>
+                <a:spcPct val="100000"/>
+              </a:lnSpc>
+              <a:spcBef>
+                <a:spcPts val="0"/>
+              </a:spcBef>
+              <a:spcAft>
+                <a:spcPts val="0"/>
+              </a:spcAft>
+              <a:buClrTx/>
+              <a:buSzTx/>
+              <a:buFontTx/>
+              <a:buNone/>
+              <a:tabLst/>
+              <a:defRPr/>
+            </a:pPr>
+            <a:endParaRPr lang="en-US" altLang="zh-CN" sz="1200" dirty="0"/>
+          </a:p>
+          <a:p>
+            <a:pPr marL="0" marR="0" lvl="0" indent="0" algn="l" defTabSz="914400" rtl="0" eaLnBrk="1" fontAlgn="auto" latinLnBrk="0" hangingPunct="1">
+              <a:lnSpc>
+                <a:spcPct val="100000"/>
+              </a:lnSpc>
+              <a:spcBef>
+                <a:spcPts val="0"/>
+              </a:spcBef>
+              <a:spcAft>
+                <a:spcPts val="0"/>
+              </a:spcAft>
+              <a:buClrTx/>
+              <a:buSzTx/>
+              <a:buFontTx/>
+              <a:buNone/>
+              <a:tabLst/>
+              <a:defRPr/>
+            </a:pPr>
+            <a:r>
+              <a:rPr lang="zh-CN" altLang="en-US" sz="1200" dirty="0"/>
+              <a:t>攻击手段的</a:t>
+            </a:r>
+            <a:endParaRPr lang="en-US" altLang="zh-CN" sz="1200" dirty="0"/>
+          </a:p>
+          <a:p>
+            <a:pPr marL="0" marR="0" lvl="0" indent="0" algn="l" defTabSz="914400" rtl="0" eaLnBrk="1" fontAlgn="auto" latinLnBrk="0" hangingPunct="1">
+              <a:lnSpc>
+                <a:spcPct val="100000"/>
+              </a:lnSpc>
+              <a:spcBef>
+                <a:spcPts val="0"/>
+              </a:spcBef>
+              <a:spcAft>
+                <a:spcPts val="0"/>
+              </a:spcAft>
+              <a:buClrTx/>
+              <a:buSzTx/>
+              <a:buFontTx/>
+              <a:buNone/>
+              <a:tabLst/>
+              <a:defRPr/>
+            </a:pPr>
+            <a:endParaRPr lang="en-US" altLang="zh-CN" sz="1200" dirty="0"/>
+          </a:p>
+          <a:p>
+            <a:pPr marL="0" marR="0" lvl="0" indent="0" algn="l" defTabSz="914400" rtl="0" eaLnBrk="1" fontAlgn="auto" latinLnBrk="0" hangingPunct="1">
+              <a:lnSpc>
+                <a:spcPct val="100000"/>
+              </a:lnSpc>
+              <a:spcBef>
+                <a:spcPts val="0"/>
+              </a:spcBef>
+              <a:spcAft>
+                <a:spcPts val="0"/>
+              </a:spcAft>
+              <a:buClrTx/>
+              <a:buSzTx/>
+              <a:buFontTx/>
+              <a:buNone/>
+              <a:tabLst/>
+              <a:defRPr/>
+            </a:pPr>
+            <a:r>
+              <a:rPr lang="zh-CN" altLang="en-US" sz="1200" dirty="0"/>
+              <a:t>另一个</a:t>
+            </a:r>
+            <a:r>
+              <a:rPr lang="en-US" altLang="zh-CN" sz="1200" dirty="0"/>
+              <a:t>Motivation,</a:t>
+            </a:r>
+            <a:r>
+              <a:rPr lang="zh-CN" altLang="en-US" sz="1200" dirty="0"/>
+              <a:t> 目前</a:t>
+            </a:r>
+            <a:r>
+              <a:rPr lang="en-US" altLang="zh-CN" sz="1200" dirty="0"/>
+              <a:t>Cloud-based</a:t>
+            </a:r>
+            <a:r>
+              <a:rPr lang="zh-CN" altLang="en-US" sz="1200" dirty="0"/>
+              <a:t>或者</a:t>
+            </a:r>
+            <a:r>
+              <a:rPr lang="en-US" altLang="zh-CN" sz="1200" dirty="0"/>
+              <a:t>hybrid</a:t>
+            </a:r>
+            <a:r>
+              <a:rPr lang="zh-CN" altLang="en-US" sz="1200" dirty="0"/>
+              <a:t> </a:t>
+            </a:r>
+            <a:r>
+              <a:rPr lang="en-US" altLang="zh-CN" sz="1200" dirty="0"/>
+              <a:t>framework</a:t>
+            </a:r>
+            <a:r>
+              <a:rPr lang="zh-CN" altLang="en-US" sz="1200" dirty="0"/>
+              <a:t>的</a:t>
+            </a:r>
+            <a:r>
+              <a:rPr lang="en-US" altLang="zh-CN" sz="1200" dirty="0"/>
+              <a:t>AI-based</a:t>
+            </a:r>
+            <a:r>
+              <a:rPr lang="zh-CN" altLang="en-US" sz="1200" dirty="0"/>
+              <a:t> </a:t>
+            </a:r>
+            <a:r>
+              <a:rPr lang="en-US" altLang="zh-CN" sz="1200" dirty="0"/>
+              <a:t>IDS,</a:t>
+            </a:r>
+            <a:r>
+              <a:rPr lang="zh-CN" altLang="en-US" sz="1200" dirty="0"/>
+              <a:t> 目前上报流量较大</a:t>
+            </a:r>
+            <a:r>
+              <a:rPr lang="en-US" altLang="zh-CN" sz="1200" dirty="0"/>
+              <a:t>,</a:t>
+            </a:r>
+            <a:r>
+              <a:rPr lang="zh-CN" altLang="en-US" sz="1200" dirty="0"/>
+              <a:t> 可以达到上百</a:t>
+            </a:r>
+            <a:r>
+              <a:rPr lang="en-US" altLang="zh-CN" sz="1200" dirty="0"/>
+              <a:t>G</a:t>
+            </a:r>
+            <a:r>
+              <a:rPr lang="zh-CN" altLang="en-US" sz="1200" dirty="0"/>
+              <a:t>的流量 </a:t>
+            </a:r>
+            <a:r>
+              <a:rPr lang="en-US" altLang="zh-CN" sz="1200" dirty="0"/>
+              <a:t>(</a:t>
+            </a:r>
+            <a:r>
+              <a:rPr lang="zh-CN" altLang="en-US" sz="1200" dirty="0"/>
+              <a:t>这个信息可以说直接来着我的</a:t>
+            </a:r>
+            <a:r>
+              <a:rPr lang="en-US" altLang="zh-CN" sz="1200" dirty="0"/>
+              <a:t>,</a:t>
+            </a:r>
+            <a:r>
+              <a:rPr lang="zh-CN" altLang="en-US" sz="1200" dirty="0"/>
+              <a:t> 我可以直接表明我是做云计算的</a:t>
+            </a:r>
+            <a:r>
+              <a:rPr lang="en-US" altLang="zh-CN" sz="1200" dirty="0"/>
+              <a:t>,</a:t>
+            </a:r>
+            <a:r>
+              <a:rPr lang="zh-CN" altLang="en-US" sz="1200" dirty="0"/>
+              <a:t> 承载云上</a:t>
+            </a:r>
+            <a:r>
+              <a:rPr lang="en-US" altLang="zh-CN" sz="1200" dirty="0"/>
+              <a:t>IDS).</a:t>
+            </a:r>
+          </a:p>
+          <a:p>
+            <a:pPr marL="0" marR="0" lvl="0" indent="0" algn="l" defTabSz="914400" rtl="0" eaLnBrk="1" fontAlgn="auto" latinLnBrk="0" hangingPunct="1">
+              <a:lnSpc>
+                <a:spcPct val="100000"/>
+              </a:lnSpc>
+              <a:spcBef>
+                <a:spcPts val="0"/>
+              </a:spcBef>
+              <a:spcAft>
+                <a:spcPts val="0"/>
+              </a:spcAft>
+              <a:buClrTx/>
+              <a:buSzTx/>
+              <a:buFontTx/>
+              <a:buNone/>
+              <a:tabLst/>
+              <a:defRPr/>
+            </a:pPr>
+            <a:endParaRPr lang="en-US" altLang="zh-CN" sz="1200" dirty="0"/>
+          </a:p>
+          <a:p>
+            <a:pPr marL="0" marR="0" lvl="0" indent="0" algn="l" defTabSz="914400" rtl="0" eaLnBrk="1" fontAlgn="auto" latinLnBrk="0" hangingPunct="1">
+              <a:lnSpc>
+                <a:spcPct val="100000"/>
+              </a:lnSpc>
+              <a:spcBef>
+                <a:spcPts val="0"/>
+              </a:spcBef>
+              <a:spcAft>
+                <a:spcPts val="0"/>
+              </a:spcAft>
+              <a:buClrTx/>
+              <a:buSzTx/>
+              <a:buFontTx/>
+              <a:buNone/>
+              <a:tabLst/>
+              <a:defRPr/>
+            </a:pPr>
+            <a:br>
+              <a:rPr lang="en-US" altLang="zh-CN" sz="1200" dirty="0"/>
+            </a:br>
+            <a:br>
+              <a:rPr lang="en-US" altLang="zh-CN" sz="1200" dirty="0"/>
+            </a:br>
+            <a:endParaRPr lang="en-US" altLang="zh-CN" sz="1200" dirty="0"/>
           </a:p>
         </p:txBody>
       </p:sp>
@@ -715,6 +1082,1026 @@
           <a:bodyPr/>
           <a:lstStyle/>
           <a:p>
+            <a:pPr marL="0" marR="0" lvl="0" indent="0" algn="l" defTabSz="914400" rtl="0" eaLnBrk="1" fontAlgn="auto" latinLnBrk="0" hangingPunct="1">
+              <a:lnSpc>
+                <a:spcPct val="100000"/>
+              </a:lnSpc>
+              <a:spcBef>
+                <a:spcPts val="0"/>
+              </a:spcBef>
+              <a:spcAft>
+                <a:spcPts val="0"/>
+              </a:spcAft>
+              <a:buClrTx/>
+              <a:buSzTx/>
+              <a:buFontTx/>
+              <a:buNone/>
+              <a:tabLst/>
+              <a:defRPr/>
+            </a:pPr>
+            <a:endParaRPr lang="en-GB" altLang="zh-CN" b="1" dirty="0">
+              <a:solidFill>
+                <a:schemeClr val="tx2"/>
+              </a:solidFill>
+            </a:endParaRPr>
+          </a:p>
+          <a:p>
+            <a:pPr marL="0" marR="0" lvl="0" indent="0" algn="l" defTabSz="914400" rtl="0" eaLnBrk="1" fontAlgn="auto" latinLnBrk="0" hangingPunct="1">
+              <a:lnSpc>
+                <a:spcPct val="100000"/>
+              </a:lnSpc>
+              <a:spcBef>
+                <a:spcPts val="0"/>
+              </a:spcBef>
+              <a:spcAft>
+                <a:spcPts val="0"/>
+              </a:spcAft>
+              <a:buClrTx/>
+              <a:buSzTx/>
+              <a:buFontTx/>
+              <a:buNone/>
+              <a:tabLst/>
+              <a:defRPr/>
+            </a:pPr>
+            <a:r>
+              <a:rPr lang="en-GB" altLang="zh-CN" b="1" dirty="0">
+                <a:solidFill>
+                  <a:schemeClr val="tx2"/>
+                </a:solidFill>
+              </a:rPr>
+              <a:t>GAP</a:t>
+            </a:r>
+            <a:r>
+              <a:rPr lang="en-US" altLang="zh-CN" b="1" dirty="0">
+                <a:solidFill>
+                  <a:schemeClr val="tx2"/>
+                </a:solidFill>
+              </a:rPr>
+              <a:t>:</a:t>
+            </a:r>
+            <a:r>
+              <a:rPr lang="zh-CN" altLang="en-US" b="1" dirty="0">
+                <a:solidFill>
+                  <a:schemeClr val="tx2"/>
+                </a:solidFill>
+              </a:rPr>
+              <a:t> </a:t>
+            </a:r>
+            <a:r>
+              <a:rPr lang="en-GB" altLang="zh-CN" b="1" dirty="0">
+                <a:solidFill>
+                  <a:schemeClr val="tx2"/>
+                </a:solidFill>
+              </a:rPr>
+              <a:t>Hybrid Framework</a:t>
+            </a:r>
+            <a:r>
+              <a:rPr lang="zh-CN" altLang="en-US" b="1" dirty="0">
+                <a:solidFill>
+                  <a:schemeClr val="tx2"/>
+                </a:solidFill>
+              </a:rPr>
+              <a:t> </a:t>
+            </a:r>
+            <a:r>
+              <a:rPr lang="zh-CN" altLang="en-GB" b="1" dirty="0">
+                <a:solidFill>
+                  <a:schemeClr val="tx2"/>
+                </a:solidFill>
+              </a:rPr>
+              <a:t>实际上</a:t>
+            </a:r>
+            <a:r>
+              <a:rPr lang="zh-CN" altLang="en-US" b="1" dirty="0">
+                <a:solidFill>
+                  <a:schemeClr val="tx2"/>
+                </a:solidFill>
+              </a:rPr>
+              <a:t>主要关注在通过</a:t>
+            </a:r>
+            <a:r>
+              <a:rPr lang="en-US" altLang="zh-CN" b="1" dirty="0">
+                <a:solidFill>
+                  <a:schemeClr val="tx2"/>
+                </a:solidFill>
+              </a:rPr>
+              <a:t>Hybrid</a:t>
+            </a:r>
+            <a:r>
+              <a:rPr lang="zh-CN" altLang="en-US" b="1" dirty="0">
+                <a:solidFill>
+                  <a:schemeClr val="tx2"/>
+                </a:solidFill>
+              </a:rPr>
+              <a:t> </a:t>
+            </a:r>
+            <a:r>
+              <a:rPr lang="en-US" altLang="zh-CN" b="1" dirty="0">
+                <a:solidFill>
+                  <a:schemeClr val="tx2"/>
+                </a:solidFill>
+              </a:rPr>
+              <a:t>Framework</a:t>
+            </a:r>
+            <a:r>
+              <a:rPr lang="zh-CN" altLang="en-US" b="1" dirty="0">
+                <a:solidFill>
+                  <a:schemeClr val="tx2"/>
+                </a:solidFill>
+              </a:rPr>
+              <a:t> 提高</a:t>
+            </a:r>
+            <a:r>
+              <a:rPr lang="en-US" altLang="zh-CN" b="1" dirty="0">
+                <a:solidFill>
+                  <a:schemeClr val="tx2"/>
+                </a:solidFill>
+              </a:rPr>
+              <a:t>accuracy.</a:t>
+            </a:r>
+            <a:r>
+              <a:rPr lang="zh-CN" altLang="en-US" b="1" dirty="0">
+                <a:solidFill>
+                  <a:schemeClr val="tx2"/>
+                </a:solidFill>
+              </a:rPr>
+              <a:t>  并没有评估</a:t>
+            </a:r>
+            <a:r>
+              <a:rPr lang="en-US" altLang="zh-CN" b="1" dirty="0">
+                <a:solidFill>
+                  <a:schemeClr val="tx2"/>
+                </a:solidFill>
+              </a:rPr>
+              <a:t>hybrid</a:t>
+            </a:r>
+            <a:r>
+              <a:rPr lang="zh-CN" altLang="en-US" b="1" dirty="0">
+                <a:solidFill>
+                  <a:schemeClr val="tx2"/>
+                </a:solidFill>
+              </a:rPr>
+              <a:t> </a:t>
+            </a:r>
+            <a:r>
+              <a:rPr lang="en-US" altLang="zh-CN" b="1" dirty="0">
+                <a:solidFill>
+                  <a:schemeClr val="tx2"/>
+                </a:solidFill>
+              </a:rPr>
+              <a:t>framework</a:t>
+            </a:r>
+            <a:r>
+              <a:rPr lang="zh-CN" altLang="en-US" b="1" dirty="0">
+                <a:solidFill>
+                  <a:schemeClr val="tx2"/>
+                </a:solidFill>
+              </a:rPr>
+              <a:t>所使用</a:t>
+            </a:r>
+            <a:r>
+              <a:rPr lang="en-US" altLang="zh-CN" b="1" dirty="0">
+                <a:solidFill>
+                  <a:schemeClr val="tx2"/>
+                </a:solidFill>
+              </a:rPr>
+              <a:t>feature</a:t>
+            </a:r>
+            <a:r>
+              <a:rPr lang="zh-CN" altLang="en-US" b="1" dirty="0">
+                <a:solidFill>
+                  <a:schemeClr val="tx2"/>
+                </a:solidFill>
+              </a:rPr>
+              <a:t> </a:t>
+            </a:r>
+            <a:r>
+              <a:rPr lang="en-US" altLang="zh-CN" b="1" dirty="0">
+                <a:solidFill>
+                  <a:schemeClr val="tx2"/>
+                </a:solidFill>
+              </a:rPr>
+              <a:t>extraction</a:t>
+            </a:r>
+            <a:r>
+              <a:rPr lang="zh-CN" altLang="en-US" b="1" dirty="0">
+                <a:solidFill>
+                  <a:schemeClr val="tx2"/>
+                </a:solidFill>
+              </a:rPr>
+              <a:t> 的资源开销</a:t>
+            </a:r>
+            <a:r>
+              <a:rPr lang="en-US" altLang="zh-CN" b="1" dirty="0">
+                <a:solidFill>
+                  <a:schemeClr val="tx2"/>
+                </a:solidFill>
+              </a:rPr>
+              <a:t>.</a:t>
+            </a:r>
+            <a:r>
+              <a:rPr lang="zh-CN" altLang="en-US" b="1" dirty="0">
+                <a:solidFill>
+                  <a:schemeClr val="tx2"/>
+                </a:solidFill>
+              </a:rPr>
+              <a:t> </a:t>
+            </a:r>
+            <a:endParaRPr lang="en-GB" altLang="zh-CN" b="1" dirty="0">
+              <a:solidFill>
+                <a:schemeClr val="tx2"/>
+              </a:solidFill>
+            </a:endParaRPr>
+          </a:p>
+          <a:p>
+            <a:pPr marL="0" marR="0" lvl="0" indent="0" algn="l" defTabSz="914400" rtl="0" eaLnBrk="1" fontAlgn="auto" latinLnBrk="0" hangingPunct="1">
+              <a:lnSpc>
+                <a:spcPct val="100000"/>
+              </a:lnSpc>
+              <a:spcBef>
+                <a:spcPts val="0"/>
+              </a:spcBef>
+              <a:spcAft>
+                <a:spcPts val="0"/>
+              </a:spcAft>
+              <a:buClrTx/>
+              <a:buSzTx/>
+              <a:buFontTx/>
+              <a:buNone/>
+              <a:tabLst/>
+              <a:defRPr/>
+            </a:pPr>
+            <a:endParaRPr lang="en-GB" altLang="zh-CN" b="1" dirty="0">
+              <a:solidFill>
+                <a:schemeClr val="tx2"/>
+              </a:solidFill>
+            </a:endParaRPr>
+          </a:p>
+          <a:p>
+            <a:pPr marL="0" marR="0" lvl="0" indent="0" algn="l" defTabSz="914400" rtl="0" eaLnBrk="1" fontAlgn="auto" latinLnBrk="0" hangingPunct="1">
+              <a:lnSpc>
+                <a:spcPct val="100000"/>
+              </a:lnSpc>
+              <a:spcBef>
+                <a:spcPts val="0"/>
+              </a:spcBef>
+              <a:spcAft>
+                <a:spcPts val="0"/>
+              </a:spcAft>
+              <a:buClrTx/>
+              <a:buSzTx/>
+              <a:buFontTx/>
+              <a:buNone/>
+              <a:tabLst/>
+              <a:defRPr/>
+            </a:pPr>
+            <a:r>
+              <a:rPr lang="en-GB" altLang="zh-CN" b="1" dirty="0">
+                <a:solidFill>
+                  <a:schemeClr val="tx2"/>
+                </a:solidFill>
+              </a:rPr>
+              <a:t>Contribution</a:t>
+            </a:r>
+            <a:r>
+              <a:rPr lang="en-US" altLang="zh-CN" b="1" dirty="0">
+                <a:solidFill>
+                  <a:schemeClr val="tx2"/>
+                </a:solidFill>
+              </a:rPr>
+              <a:t>,</a:t>
+            </a:r>
+            <a:r>
+              <a:rPr lang="zh-CN" altLang="en-US" b="1" dirty="0">
+                <a:solidFill>
+                  <a:schemeClr val="tx2"/>
+                </a:solidFill>
+              </a:rPr>
+              <a:t> 我们这次评估的方法</a:t>
+            </a:r>
+            <a:r>
+              <a:rPr lang="en-US" altLang="zh-CN" b="1" dirty="0">
+                <a:solidFill>
+                  <a:schemeClr val="tx2"/>
+                </a:solidFill>
+              </a:rPr>
+              <a:t>,</a:t>
+            </a:r>
+            <a:r>
+              <a:rPr lang="zh-CN" altLang="en-US" b="1" dirty="0">
+                <a:solidFill>
+                  <a:schemeClr val="tx2"/>
+                </a:solidFill>
+              </a:rPr>
+              <a:t> 通过模拟</a:t>
+            </a:r>
+            <a:r>
+              <a:rPr lang="en-US" altLang="zh-CN" b="1" dirty="0">
+                <a:solidFill>
+                  <a:schemeClr val="tx2"/>
+                </a:solidFill>
+              </a:rPr>
+              <a:t>edge</a:t>
+            </a:r>
+            <a:r>
+              <a:rPr lang="zh-CN" altLang="en-US" b="1" dirty="0">
+                <a:solidFill>
+                  <a:schemeClr val="tx2"/>
+                </a:solidFill>
+              </a:rPr>
+              <a:t>和</a:t>
+            </a:r>
+            <a:r>
+              <a:rPr lang="en-US" altLang="zh-CN" b="1" dirty="0">
+                <a:solidFill>
+                  <a:schemeClr val="tx2"/>
+                </a:solidFill>
+              </a:rPr>
+              <a:t>cloud</a:t>
+            </a:r>
+            <a:r>
+              <a:rPr lang="zh-CN" altLang="en-US" b="1" dirty="0">
+                <a:solidFill>
+                  <a:schemeClr val="tx2"/>
+                </a:solidFill>
+              </a:rPr>
+              <a:t>分离</a:t>
+            </a:r>
+            <a:r>
+              <a:rPr lang="en-US" altLang="zh-CN" b="1" dirty="0">
+                <a:solidFill>
+                  <a:schemeClr val="tx2"/>
+                </a:solidFill>
+              </a:rPr>
+              <a:t>,</a:t>
+            </a:r>
+            <a:r>
+              <a:rPr lang="zh-CN" altLang="en-US" b="1" dirty="0">
+                <a:solidFill>
+                  <a:schemeClr val="tx2"/>
+                </a:solidFill>
+              </a:rPr>
+              <a:t> 系统评估</a:t>
+            </a:r>
+            <a:r>
+              <a:rPr lang="en-US" altLang="zh-CN" b="1" dirty="0">
+                <a:solidFill>
+                  <a:schemeClr val="tx2"/>
+                </a:solidFill>
+              </a:rPr>
+              <a:t>edge</a:t>
+            </a:r>
+            <a:r>
+              <a:rPr lang="zh-CN" altLang="en-US" b="1" dirty="0">
+                <a:solidFill>
+                  <a:schemeClr val="tx2"/>
+                </a:solidFill>
+              </a:rPr>
+              <a:t>端的</a:t>
+            </a:r>
+            <a:r>
+              <a:rPr lang="en-US" altLang="zh-CN" b="1" dirty="0">
+                <a:solidFill>
+                  <a:schemeClr val="tx2"/>
+                </a:solidFill>
+              </a:rPr>
+              <a:t>feature</a:t>
+            </a:r>
+            <a:r>
+              <a:rPr lang="zh-CN" altLang="en-US" b="1" dirty="0">
+                <a:solidFill>
+                  <a:schemeClr val="tx2"/>
+                </a:solidFill>
+              </a:rPr>
+              <a:t> </a:t>
+            </a:r>
+            <a:r>
+              <a:rPr lang="en-US" altLang="zh-CN" b="1" dirty="0">
+                <a:solidFill>
+                  <a:schemeClr val="tx2"/>
+                </a:solidFill>
+              </a:rPr>
+              <a:t>extraction</a:t>
+            </a:r>
+            <a:r>
+              <a:rPr lang="zh-CN" altLang="en-US" b="1" dirty="0">
+                <a:solidFill>
+                  <a:schemeClr val="tx2"/>
+                </a:solidFill>
+              </a:rPr>
+              <a:t>网络</a:t>
+            </a:r>
+            <a:r>
+              <a:rPr lang="en-US" altLang="zh-CN" b="1" dirty="0">
+                <a:solidFill>
+                  <a:schemeClr val="tx2"/>
+                </a:solidFill>
+              </a:rPr>
+              <a:t>,</a:t>
+            </a:r>
+            <a:r>
+              <a:rPr lang="zh-CN" altLang="en-US" b="1" dirty="0">
+                <a:solidFill>
+                  <a:schemeClr val="tx2"/>
+                </a:solidFill>
+              </a:rPr>
+              <a:t> </a:t>
+            </a:r>
+            <a:r>
+              <a:rPr lang="en-US" altLang="zh-CN" b="1" dirty="0">
+                <a:solidFill>
+                  <a:schemeClr val="tx2"/>
+                </a:solidFill>
+              </a:rPr>
+              <a:t>CPU,</a:t>
+            </a:r>
+            <a:r>
+              <a:rPr lang="zh-CN" altLang="en-US" b="1" dirty="0">
+                <a:solidFill>
+                  <a:schemeClr val="tx2"/>
+                </a:solidFill>
+              </a:rPr>
+              <a:t> 内存</a:t>
+            </a:r>
+            <a:r>
+              <a:rPr lang="en-US" altLang="zh-CN" b="1" dirty="0">
+                <a:solidFill>
+                  <a:schemeClr val="tx2"/>
+                </a:solidFill>
+              </a:rPr>
+              <a:t>.</a:t>
+            </a:r>
+          </a:p>
+          <a:p>
+            <a:pPr marL="0" marR="0" lvl="0" indent="0" algn="l" defTabSz="914400" rtl="0" eaLnBrk="1" fontAlgn="auto" latinLnBrk="0" hangingPunct="1">
+              <a:lnSpc>
+                <a:spcPct val="100000"/>
+              </a:lnSpc>
+              <a:spcBef>
+                <a:spcPts val="0"/>
+              </a:spcBef>
+              <a:spcAft>
+                <a:spcPts val="0"/>
+              </a:spcAft>
+              <a:buClrTx/>
+              <a:buSzTx/>
+              <a:buFontTx/>
+              <a:buNone/>
+              <a:tabLst/>
+              <a:defRPr/>
+            </a:pPr>
+            <a:endParaRPr lang="en-GB" altLang="zh-CN" b="1" dirty="0">
+              <a:solidFill>
+                <a:schemeClr val="tx2"/>
+              </a:solidFill>
+            </a:endParaRPr>
+          </a:p>
+          <a:p>
+            <a:pPr marL="0" marR="0" lvl="0" indent="0" algn="l" defTabSz="914400" rtl="0" eaLnBrk="1" fontAlgn="auto" latinLnBrk="0" hangingPunct="1">
+              <a:lnSpc>
+                <a:spcPct val="100000"/>
+              </a:lnSpc>
+              <a:spcBef>
+                <a:spcPts val="0"/>
+              </a:spcBef>
+              <a:spcAft>
+                <a:spcPts val="0"/>
+              </a:spcAft>
+              <a:buClrTx/>
+              <a:buSzTx/>
+              <a:buFontTx/>
+              <a:buNone/>
+              <a:tabLst/>
+              <a:defRPr/>
+            </a:pPr>
+            <a:r>
+              <a:rPr lang="en-GB" altLang="zh-CN" b="1" dirty="0">
+                <a:solidFill>
+                  <a:schemeClr val="tx2"/>
+                </a:solidFill>
+              </a:rPr>
+              <a:t>Feature transmission</a:t>
+            </a:r>
+            <a:r>
+              <a:rPr lang="zh-CN" altLang="en-GB" b="1" dirty="0">
+                <a:solidFill>
+                  <a:schemeClr val="tx2"/>
+                </a:solidFill>
+              </a:rPr>
+              <a:t>我</a:t>
+            </a:r>
+            <a:r>
+              <a:rPr lang="zh-CN" altLang="en-US" b="1" dirty="0">
+                <a:solidFill>
+                  <a:schemeClr val="tx2"/>
+                </a:solidFill>
+              </a:rPr>
+              <a:t>认为不用单独写了</a:t>
+            </a:r>
+            <a:r>
+              <a:rPr lang="en-US" altLang="zh-CN" b="1" dirty="0">
+                <a:solidFill>
+                  <a:schemeClr val="tx2"/>
+                </a:solidFill>
+              </a:rPr>
+              <a:t>.</a:t>
+            </a:r>
+            <a:endParaRPr lang="zh-CN" altLang="en-US" b="1" dirty="0">
+              <a:solidFill>
+                <a:schemeClr val="tx2"/>
+              </a:solidFill>
+            </a:endParaRPr>
+          </a:p>
+        </p:txBody>
+      </p:sp>
+      <p:sp>
+        <p:nvSpPr>
+          <p:cNvPr id="4" name="Slide Number Placeholder 3"/>
+          <p:cNvSpPr>
+            <a:spLocks noGrp="1"/>
+          </p:cNvSpPr>
+          <p:nvPr>
+            <p:ph type="sldNum" sz="quarter" idx="5"/>
+          </p:nvPr>
+        </p:nvSpPr>
+        <p:spPr/>
+        <p:txBody>
+          <a:bodyPr/>
+          <a:lstStyle/>
+          <a:p>
+            <a:fld id="{EDEF46E4-EE54-564F-BFBC-E1DA32DE0BEF}" type="slidenum">
+              <a:rPr lang="en-US" smtClean="0"/>
+              <a:t>4</a:t>
+            </a:fld>
+            <a:endParaRPr lang="en-US"/>
+          </a:p>
+        </p:txBody>
+      </p:sp>
+    </p:spTree>
+    <p:extLst>
+      <p:ext uri="{BB962C8B-B14F-4D97-AF65-F5344CB8AC3E}">
+        <p14:creationId xmlns:p14="http://schemas.microsoft.com/office/powerpoint/2010/main" val="679901516"/>
+      </p:ext>
+    </p:extLst>
+  </p:cSld>
+  <p:clrMapOvr>
+    <a:masterClrMapping/>
+  </p:clrMapOvr>
+</p:notes>
+</file>
+
+<file path=ppt/notesSlides/notesSlide4.xml><?xml version="1.0" encoding="utf-8"?>
+<p:notes xmlns:a="http://schemas.openxmlformats.org/drawingml/2006/main" xmlns:r="http://schemas.openxmlformats.org/officeDocument/2006/relationships" xmlns:p="http://schemas.openxmlformats.org/presentationml/2006/main">
+  <p:cSld>
+    <p:spTree>
+      <p:nvGrpSpPr>
+        <p:cNvPr id="1" name=""/>
+        <p:cNvGrpSpPr/>
+        <p:nvPr/>
+      </p:nvGrpSpPr>
+      <p:grpSpPr>
+        <a:xfrm>
+          <a:off x="0" y="0"/>
+          <a:ext cx="0" cy="0"/>
+          <a:chOff x="0" y="0"/>
+          <a:chExt cx="0" cy="0"/>
+        </a:xfrm>
+      </p:grpSpPr>
+      <p:sp>
+        <p:nvSpPr>
+          <p:cNvPr id="2" name="Slide Image Placeholder 1"/>
+          <p:cNvSpPr>
+            <a:spLocks noGrp="1" noRot="1" noChangeAspect="1"/>
+          </p:cNvSpPr>
+          <p:nvPr>
+            <p:ph type="sldImg"/>
+          </p:nvPr>
+        </p:nvSpPr>
+        <p:spPr/>
+      </p:sp>
+      <p:sp>
+        <p:nvSpPr>
+          <p:cNvPr id="3" name="Notes Placeholder 2"/>
+          <p:cNvSpPr>
+            <a:spLocks noGrp="1"/>
+          </p:cNvSpPr>
+          <p:nvPr>
+            <p:ph type="body" idx="1"/>
+          </p:nvPr>
+        </p:nvSpPr>
+        <p:spPr/>
+        <p:txBody>
+          <a:bodyPr/>
+          <a:lstStyle/>
+          <a:p>
+            <a:r>
+              <a:rPr lang="en-US" dirty="0" err="1"/>
+              <a:t>不用写很多文字</a:t>
+            </a:r>
+            <a:r>
+              <a:rPr lang="en-US" altLang="zh-CN" dirty="0"/>
+              <a:t>,</a:t>
+            </a:r>
+            <a:r>
+              <a:rPr lang="zh-CN" altLang="en-US" dirty="0"/>
+              <a:t> </a:t>
+            </a:r>
+            <a:r>
+              <a:rPr lang="en-US" altLang="zh-CN" dirty="0"/>
+              <a:t>Federated</a:t>
+            </a:r>
+            <a:r>
+              <a:rPr lang="zh-CN" altLang="en-US" dirty="0"/>
+              <a:t> </a:t>
+            </a:r>
+            <a:r>
+              <a:rPr lang="en-US" altLang="zh-CN" dirty="0"/>
+              <a:t>Learning</a:t>
+            </a:r>
+            <a:r>
+              <a:rPr lang="zh-CN" altLang="en-GB" dirty="0"/>
+              <a:t>不要</a:t>
+            </a:r>
+            <a:r>
+              <a:rPr lang="zh-CN" altLang="en-US" dirty="0"/>
+              <a:t>去提具体算法</a:t>
+            </a:r>
+            <a:r>
+              <a:rPr lang="en-US" altLang="zh-CN" dirty="0"/>
+              <a:t>.</a:t>
+            </a:r>
+            <a:r>
+              <a:rPr lang="zh-CN" altLang="en-US" dirty="0"/>
+              <a:t> 你这个</a:t>
+            </a:r>
+            <a:r>
+              <a:rPr lang="en-US" altLang="zh-CN" dirty="0"/>
+              <a:t>PPT</a:t>
+            </a:r>
+            <a:r>
+              <a:rPr lang="zh-CN" altLang="en-US" dirty="0"/>
+              <a:t>只是要讲</a:t>
+            </a:r>
+            <a:r>
+              <a:rPr lang="en-US" altLang="zh-CN" dirty="0"/>
+              <a:t>7</a:t>
+            </a:r>
+            <a:r>
+              <a:rPr lang="zh-CN" altLang="en-US" dirty="0"/>
+              <a:t>分钟左右</a:t>
+            </a:r>
+            <a:r>
+              <a:rPr lang="en-US" altLang="zh-CN" dirty="0"/>
+              <a:t>.</a:t>
+            </a:r>
+            <a:r>
+              <a:rPr lang="zh-CN" altLang="en-US" dirty="0"/>
+              <a:t>直接明了的说</a:t>
+            </a:r>
+            <a:r>
+              <a:rPr lang="en-US" altLang="zh-CN" dirty="0"/>
+              <a:t>,</a:t>
+            </a:r>
+            <a:r>
+              <a:rPr lang="zh-CN" altLang="en-US" dirty="0"/>
+              <a:t> 大家都在想办法提高</a:t>
+            </a:r>
+            <a:r>
+              <a:rPr lang="en-US" altLang="zh-CN" dirty="0"/>
+              <a:t>Federated</a:t>
+            </a:r>
+            <a:r>
+              <a:rPr lang="zh-CN" altLang="en-US" dirty="0"/>
+              <a:t> </a:t>
+            </a:r>
+            <a:r>
+              <a:rPr lang="en-US" altLang="zh-CN" dirty="0"/>
+              <a:t>Learning</a:t>
+            </a:r>
+            <a:r>
+              <a:rPr lang="zh-CN" altLang="en-US" dirty="0"/>
+              <a:t>的</a:t>
+            </a:r>
+            <a:r>
+              <a:rPr lang="en-US" altLang="zh-CN" dirty="0"/>
+              <a:t>accuracy,</a:t>
+            </a:r>
+            <a:r>
+              <a:rPr lang="zh-CN" altLang="en-US" dirty="0"/>
+              <a:t> 降低训练开销和传输开销</a:t>
+            </a:r>
+            <a:r>
+              <a:rPr lang="en-US" altLang="zh-CN" dirty="0"/>
+              <a:t>.</a:t>
+            </a:r>
+          </a:p>
+          <a:p>
+            <a:endParaRPr lang="en-US" dirty="0"/>
+          </a:p>
+          <a:p>
+            <a:pPr marL="0" marR="0" lvl="0" indent="0" algn="l" defTabSz="914400" rtl="0" eaLnBrk="1" fontAlgn="auto" latinLnBrk="0" hangingPunct="1">
+              <a:lnSpc>
+                <a:spcPct val="100000"/>
+              </a:lnSpc>
+              <a:spcBef>
+                <a:spcPts val="0"/>
+              </a:spcBef>
+              <a:spcAft>
+                <a:spcPts val="0"/>
+              </a:spcAft>
+              <a:buClrTx/>
+              <a:buSzTx/>
+              <a:buFontTx/>
+              <a:buNone/>
+              <a:tabLst/>
+              <a:defRPr/>
+            </a:pPr>
+            <a:r>
+              <a:rPr lang="zh-CN" altLang="en-US" dirty="0"/>
+              <a:t>提高</a:t>
+            </a:r>
+            <a:r>
+              <a:rPr lang="en-US" altLang="zh-CN" dirty="0"/>
+              <a:t>Lightweight ML </a:t>
+            </a:r>
+            <a:r>
+              <a:rPr lang="zh-CN" altLang="en-US" dirty="0"/>
+              <a:t>提高</a:t>
+            </a:r>
+            <a:r>
+              <a:rPr lang="en-US" altLang="zh-CN" dirty="0"/>
+              <a:t>accuracy,</a:t>
+            </a:r>
+            <a:r>
+              <a:rPr lang="zh-CN" altLang="en-US" dirty="0"/>
+              <a:t> 而且也没有真正</a:t>
+            </a:r>
+            <a:r>
+              <a:rPr lang="en-US" altLang="zh-CN" dirty="0"/>
+              <a:t>CPU,</a:t>
+            </a:r>
+            <a:r>
+              <a:rPr lang="zh-CN" altLang="en-US" dirty="0"/>
+              <a:t> </a:t>
+            </a:r>
+            <a:r>
+              <a:rPr lang="en-US" altLang="zh-CN" dirty="0"/>
+              <a:t>memory</a:t>
+            </a:r>
+            <a:r>
+              <a:rPr lang="zh-CN" altLang="en-US" dirty="0"/>
+              <a:t>的评估开销</a:t>
+            </a:r>
+            <a:r>
+              <a:rPr lang="en-US" altLang="zh-CN" dirty="0"/>
+              <a:t>.</a:t>
+            </a:r>
+            <a:r>
+              <a:rPr lang="zh-CN" altLang="en-US" dirty="0"/>
+              <a:t> 只是认为</a:t>
+            </a:r>
+            <a:r>
+              <a:rPr lang="en-US" altLang="zh-CN" dirty="0"/>
+              <a:t>lightweight</a:t>
+            </a:r>
+            <a:r>
+              <a:rPr lang="zh-CN" altLang="en-US" dirty="0"/>
+              <a:t> </a:t>
+            </a:r>
+            <a:r>
+              <a:rPr lang="en-US" altLang="zh-CN" dirty="0"/>
+              <a:t>ML</a:t>
+            </a:r>
+            <a:r>
+              <a:rPr lang="zh-CN" altLang="en-US" dirty="0"/>
+              <a:t>就可以部署在</a:t>
+            </a:r>
+            <a:r>
+              <a:rPr lang="en-US" altLang="zh-CN" dirty="0"/>
+              <a:t>edge</a:t>
+            </a:r>
+            <a:r>
+              <a:rPr lang="zh-CN" altLang="en-US" dirty="0"/>
+              <a:t>上</a:t>
+            </a:r>
+            <a:r>
+              <a:rPr lang="en-US" altLang="zh-CN" dirty="0"/>
+              <a:t>.</a:t>
+            </a:r>
+            <a:r>
+              <a:rPr lang="zh-CN" altLang="en-US" dirty="0"/>
+              <a:t> 在 </a:t>
+            </a:r>
+            <a:r>
+              <a:rPr lang="en-GB" dirty="0"/>
+              <a:t>GPU / </a:t>
+            </a:r>
+            <a:r>
+              <a:rPr lang="en-GB" dirty="0" err="1"/>
+              <a:t>server或者</a:t>
+            </a:r>
+            <a:r>
+              <a:rPr lang="zh-CN" altLang="en-US" dirty="0"/>
+              <a:t>用高性能机器</a:t>
+            </a:r>
+            <a:r>
+              <a:rPr lang="en-GB" dirty="0"/>
+              <a:t> </a:t>
+            </a:r>
+            <a:r>
+              <a:rPr lang="zh-CN" altLang="en-US" dirty="0"/>
+              <a:t>上跑</a:t>
+            </a:r>
+            <a:r>
+              <a:rPr lang="en-US" altLang="zh-CN" dirty="0"/>
+              <a:t>,</a:t>
+            </a:r>
+            <a:r>
+              <a:rPr lang="zh-CN" altLang="en-US" dirty="0"/>
+              <a:t> </a:t>
+            </a:r>
+            <a:endParaRPr lang="en-GB" altLang="zh-CN" dirty="0"/>
+          </a:p>
+          <a:p>
+            <a:pPr marL="0" marR="0" lvl="0" indent="0" algn="l" defTabSz="914400" rtl="0" eaLnBrk="1" fontAlgn="auto" latinLnBrk="0" hangingPunct="1">
+              <a:lnSpc>
+                <a:spcPct val="100000"/>
+              </a:lnSpc>
+              <a:spcBef>
+                <a:spcPts val="0"/>
+              </a:spcBef>
+              <a:spcAft>
+                <a:spcPts val="0"/>
+              </a:spcAft>
+              <a:buClrTx/>
+              <a:buSzTx/>
+              <a:buFontTx/>
+              <a:buNone/>
+              <a:tabLst/>
+              <a:defRPr/>
+            </a:pPr>
+            <a:endParaRPr lang="en-GB" altLang="zh-CN" dirty="0"/>
+          </a:p>
+          <a:p>
+            <a:pPr marL="0" marR="0" lvl="0" indent="0" algn="l" defTabSz="914400" rtl="0" eaLnBrk="1" fontAlgn="auto" latinLnBrk="0" hangingPunct="1">
+              <a:lnSpc>
+                <a:spcPct val="100000"/>
+              </a:lnSpc>
+              <a:spcBef>
+                <a:spcPts val="0"/>
+              </a:spcBef>
+              <a:spcAft>
+                <a:spcPts val="0"/>
+              </a:spcAft>
+              <a:buClrTx/>
+              <a:buSzTx/>
+              <a:buFontTx/>
+              <a:buNone/>
+              <a:tabLst/>
+              <a:defRPr/>
+            </a:pPr>
+            <a:r>
+              <a:rPr lang="en-US" altLang="zh-CN" dirty="0"/>
+              <a:t>Hybrid</a:t>
+            </a:r>
+            <a:r>
+              <a:rPr lang="zh-CN" altLang="en-US" dirty="0"/>
+              <a:t> </a:t>
+            </a:r>
+            <a:r>
+              <a:rPr lang="en-US" altLang="zh-CN" dirty="0"/>
+              <a:t>Framework</a:t>
+            </a:r>
+            <a:r>
+              <a:rPr lang="zh-CN" altLang="en-US" dirty="0"/>
+              <a:t> </a:t>
+            </a:r>
+            <a:r>
+              <a:rPr lang="zh-CN" altLang="en-GB" dirty="0"/>
+              <a:t>缺乏</a:t>
+            </a:r>
+            <a:r>
+              <a:rPr lang="zh-CN" altLang="en-US" dirty="0"/>
+              <a:t>网络开销的评估</a:t>
+            </a:r>
+            <a:r>
+              <a:rPr lang="en-US" altLang="zh-CN" dirty="0"/>
+              <a:t>.</a:t>
+            </a:r>
+            <a:r>
+              <a:rPr lang="zh-CN" altLang="en-US" dirty="0"/>
+              <a:t> </a:t>
+            </a:r>
+            <a:endParaRPr lang="en-GB" altLang="zh-CN" dirty="0"/>
+          </a:p>
+          <a:p>
+            <a:pPr marL="0" marR="0" lvl="0" indent="0" algn="l" defTabSz="914400" rtl="0" eaLnBrk="1" fontAlgn="auto" latinLnBrk="0" hangingPunct="1">
+              <a:lnSpc>
+                <a:spcPct val="100000"/>
+              </a:lnSpc>
+              <a:spcBef>
+                <a:spcPts val="0"/>
+              </a:spcBef>
+              <a:spcAft>
+                <a:spcPts val="0"/>
+              </a:spcAft>
+              <a:buClrTx/>
+              <a:buSzTx/>
+              <a:buFontTx/>
+              <a:buNone/>
+              <a:tabLst/>
+              <a:defRPr/>
+            </a:pPr>
+            <a:endParaRPr lang="en-US" altLang="zh-CN" dirty="0"/>
+          </a:p>
+          <a:p>
+            <a:endParaRPr lang="en-US" dirty="0"/>
+          </a:p>
+          <a:p>
+            <a:endParaRPr lang="en-US" dirty="0"/>
+          </a:p>
+        </p:txBody>
+      </p:sp>
+      <p:sp>
+        <p:nvSpPr>
+          <p:cNvPr id="4" name="Slide Number Placeholder 3"/>
+          <p:cNvSpPr>
+            <a:spLocks noGrp="1"/>
+          </p:cNvSpPr>
+          <p:nvPr>
+            <p:ph type="sldNum" sz="quarter" idx="5"/>
+          </p:nvPr>
+        </p:nvSpPr>
+        <p:spPr/>
+        <p:txBody>
+          <a:bodyPr/>
+          <a:lstStyle/>
+          <a:p>
+            <a:fld id="{EDEF46E4-EE54-564F-BFBC-E1DA32DE0BEF}" type="slidenum">
+              <a:rPr lang="en-US" smtClean="0"/>
+              <a:t>5</a:t>
+            </a:fld>
+            <a:endParaRPr lang="en-US"/>
+          </a:p>
+        </p:txBody>
+      </p:sp>
+    </p:spTree>
+    <p:extLst>
+      <p:ext uri="{BB962C8B-B14F-4D97-AF65-F5344CB8AC3E}">
+        <p14:creationId xmlns:p14="http://schemas.microsoft.com/office/powerpoint/2010/main" val="181082103"/>
+      </p:ext>
+    </p:extLst>
+  </p:cSld>
+  <p:clrMapOvr>
+    <a:masterClrMapping/>
+  </p:clrMapOvr>
+</p:notes>
+</file>
+
+<file path=ppt/notesSlides/notesSlide5.xml><?xml version="1.0" encoding="utf-8"?>
+<p:notes xmlns:a="http://schemas.openxmlformats.org/drawingml/2006/main" xmlns:r="http://schemas.openxmlformats.org/officeDocument/2006/relationships" xmlns:p="http://schemas.openxmlformats.org/presentationml/2006/main">
+  <p:cSld>
+    <p:spTree>
+      <p:nvGrpSpPr>
+        <p:cNvPr id="1" name=""/>
+        <p:cNvGrpSpPr/>
+        <p:nvPr/>
+      </p:nvGrpSpPr>
+      <p:grpSpPr>
+        <a:xfrm>
+          <a:off x="0" y="0"/>
+          <a:ext cx="0" cy="0"/>
+          <a:chOff x="0" y="0"/>
+          <a:chExt cx="0" cy="0"/>
+        </a:xfrm>
+      </p:grpSpPr>
+      <p:sp>
+        <p:nvSpPr>
+          <p:cNvPr id="2" name="Slide Image Placeholder 1"/>
+          <p:cNvSpPr>
+            <a:spLocks noGrp="1" noRot="1" noChangeAspect="1"/>
+          </p:cNvSpPr>
+          <p:nvPr>
+            <p:ph type="sldImg"/>
+          </p:nvPr>
+        </p:nvSpPr>
+        <p:spPr/>
+      </p:sp>
+      <p:sp>
+        <p:nvSpPr>
+          <p:cNvPr id="3" name="Notes Placeholder 2"/>
+          <p:cNvSpPr>
+            <a:spLocks noGrp="1"/>
+          </p:cNvSpPr>
+          <p:nvPr>
+            <p:ph type="body" idx="1"/>
+          </p:nvPr>
+        </p:nvSpPr>
+        <p:spPr/>
+        <p:txBody>
+          <a:bodyPr/>
+          <a:lstStyle/>
+          <a:p>
             <a:endParaRPr lang="en-US" dirty="0"/>
           </a:p>
         </p:txBody>
@@ -755,7 +2142,7 @@
 </p:notes>
 </file>
 
-<file path=ppt/notesSlides/notesSlide4.xml><?xml version="1.0" encoding="utf-8"?>
+<file path=ppt/notesSlides/notesSlide6.xml><?xml version="1.0" encoding="utf-8"?>
 <p:notes xmlns:a="http://schemas.openxmlformats.org/drawingml/2006/main" xmlns:r="http://schemas.openxmlformats.org/officeDocument/2006/relationships" xmlns:p="http://schemas.openxmlformats.org/presentationml/2006/main">
   <p:cSld>
     <p:spTree>
@@ -1018,7 +2405,7 @@
           <a:p>
             <a:fld id="{5BCAD085-E8A6-8845-BD4E-CB4CCA059FC4}" type="datetimeFigureOut">
               <a:rPr lang="en-US" smtClean="0"/>
-              <a:t>3/20/2026</a:t>
+              <a:t>3/21/26</a:t>
             </a:fld>
             <a:endParaRPr lang="en-US"/>
           </a:p>
@@ -1186,7 +2573,7 @@
           <a:p>
             <a:fld id="{5BCAD085-E8A6-8845-BD4E-CB4CCA059FC4}" type="datetimeFigureOut">
               <a:rPr lang="en-US" smtClean="0"/>
-              <a:t>3/20/2026</a:t>
+              <a:t>3/21/26</a:t>
             </a:fld>
             <a:endParaRPr lang="en-US"/>
           </a:p>
@@ -1364,7 +2751,7 @@
           <a:p>
             <a:fld id="{5BCAD085-E8A6-8845-BD4E-CB4CCA059FC4}" type="datetimeFigureOut">
               <a:rPr lang="en-US" smtClean="0"/>
-              <a:t>3/20/2026</a:t>
+              <a:t>3/21/26</a:t>
             </a:fld>
             <a:endParaRPr lang="en-US"/>
           </a:p>
@@ -1675,7 +3062,7 @@
           <a:p>
             <a:fld id="{5BCAD085-E8A6-8845-BD4E-CB4CCA059FC4}" type="datetimeFigureOut">
               <a:rPr lang="en-US" smtClean="0"/>
-              <a:t>3/20/2026</a:t>
+              <a:t>3/21/26</a:t>
             </a:fld>
             <a:endParaRPr lang="en-US"/>
           </a:p>
@@ -1920,7 +3307,7 @@
           <a:p>
             <a:fld id="{5BCAD085-E8A6-8845-BD4E-CB4CCA059FC4}" type="datetimeFigureOut">
               <a:rPr lang="en-US" smtClean="0"/>
-              <a:t>3/20/2026</a:t>
+              <a:t>3/21/26</a:t>
             </a:fld>
             <a:endParaRPr lang="en-US"/>
           </a:p>
@@ -2205,7 +3592,7 @@
           <a:p>
             <a:fld id="{5BCAD085-E8A6-8845-BD4E-CB4CCA059FC4}" type="datetimeFigureOut">
               <a:rPr lang="en-US" smtClean="0"/>
-              <a:t>3/20/2026</a:t>
+              <a:t>3/21/26</a:t>
             </a:fld>
             <a:endParaRPr lang="en-US"/>
           </a:p>
@@ -2624,7 +4011,7 @@
           <a:p>
             <a:fld id="{5BCAD085-E8A6-8845-BD4E-CB4CCA059FC4}" type="datetimeFigureOut">
               <a:rPr lang="en-US" smtClean="0"/>
-              <a:t>3/20/2026</a:t>
+              <a:t>3/21/26</a:t>
             </a:fld>
             <a:endParaRPr lang="en-US"/>
           </a:p>
@@ -2741,7 +4128,7 @@
           <a:p>
             <a:fld id="{5BCAD085-E8A6-8845-BD4E-CB4CCA059FC4}" type="datetimeFigureOut">
               <a:rPr lang="en-US" smtClean="0"/>
-              <a:t>3/20/2026</a:t>
+              <a:t>3/21/26</a:t>
             </a:fld>
             <a:endParaRPr lang="en-US"/>
           </a:p>
@@ -2836,7 +4223,7 @@
           <a:p>
             <a:fld id="{5BCAD085-E8A6-8845-BD4E-CB4CCA059FC4}" type="datetimeFigureOut">
               <a:rPr lang="en-US" smtClean="0"/>
-              <a:t>3/20/2026</a:t>
+              <a:t>3/21/26</a:t>
             </a:fld>
             <a:endParaRPr lang="en-US"/>
           </a:p>
@@ -3111,7 +4498,7 @@
           <a:p>
             <a:fld id="{5BCAD085-E8A6-8845-BD4E-CB4CCA059FC4}" type="datetimeFigureOut">
               <a:rPr lang="en-US" smtClean="0"/>
-              <a:t>3/20/2026</a:t>
+              <a:t>3/21/26</a:t>
             </a:fld>
             <a:endParaRPr lang="en-US"/>
           </a:p>
@@ -3363,7 +4750,7 @@
           <a:p>
             <a:fld id="{5BCAD085-E8A6-8845-BD4E-CB4CCA059FC4}" type="datetimeFigureOut">
               <a:rPr lang="en-US" smtClean="0"/>
-              <a:t>3/20/2026</a:t>
+              <a:t>3/21/26</a:t>
             </a:fld>
             <a:endParaRPr lang="en-US"/>
           </a:p>
@@ -3574,7 +4961,7 @@
           <a:p>
             <a:fld id="{5BCAD085-E8A6-8845-BD4E-CB4CCA059FC4}" type="datetimeFigureOut">
               <a:rPr lang="en-US" smtClean="0"/>
-              <a:t>3/20/2026</a:t>
+              <a:t>3/21/26</a:t>
             </a:fld>
             <a:endParaRPr lang="en-US"/>
           </a:p>
@@ -17402,7 +18789,7 @@
           <p:nvPr/>
         </p:nvPicPr>
         <p:blipFill>
-          <a:blip r:embed="rId19"/>
+          <a:blip r:embed="rId20"/>
           <a:stretch>
             <a:fillRect/>
           </a:stretch>
@@ -18693,7 +20080,7 @@
                     <a:schemeClr val="tx2"/>
                   </a:solidFill>
                 </a:rPr>
-                <a:t>The practical feasibility of edge–cloud hybrid deployment remains insufficiently evaluated for resource-constrained IoMT devices.</a:t>
+                <a:t>The practical feasibility of edge–cloud hybrid framework deployment remains insufficiently evaluated for resource-constrained IoMT devices.</a:t>
               </a:r>
               <a:endParaRPr lang="en-GB" altLang="zh-CN" sz="1200" dirty="0">
                 <a:solidFill>
@@ -19926,7 +21313,7 @@
           <p:nvPr/>
         </p:nvPicPr>
         <p:blipFill>
-          <a:blip r:embed="rId11"/>
+          <a:blip r:embed="rId12"/>
           <a:stretch>
             <a:fillRect/>
           </a:stretch>
